--- a/03_burden_calculations.pptx
+++ b/03_burden_calculations.pptx
@@ -3205,11 +3205,12 @@
               <a:rPr>
                 <a:latin typeface="Courier"/>
               </a:rPr>
-              <a:t># A tibble: 2 × 2
+              <a:t># A tibble: 3 × 2
   outcome                  DALY
   &lt;chr&gt;                   &lt;dbl&gt;
-1 High noise annoyance   21310.
-2 High sleep disturbance  5083.</a:t>
+1 High noise annoyance   28198.
+2 High sleep disturbance  7467.
+3 Reading Comprehension    355.</a:t>
             </a:r>
           </a:p>
         </p:txBody>
@@ -4277,82 +4278,82 @@
                       </a:pPr>
                       <a:r>
                         <a:rPr/>
-                        <a:t>industry</a:t>
-                      </a:r>
-                    </a:p>
-                  </a:txBody>
-                </a:tc>
-                <a:tc>
-                  <a:txBody>
-                    <a:bodyPr/>
-                    <a:lstStyle/>
-                    <a:p>
-                      <a:pPr lvl="0" indent="0" marL="0" algn="l">
-                        <a:buNone/>
-                      </a:pPr>
-                      <a:r>
-                        <a:rPr/>
-                        <a:t>Bundesland</a:t>
-                      </a:r>
-                    </a:p>
-                  </a:txBody>
-                </a:tc>
-                <a:tc>
-                  <a:txBody>
-                    <a:bodyPr/>
-                    <a:lstStyle/>
-                    <a:p>
-                      <a:pPr lvl="0" indent="0" marL="0" algn="l">
-                        <a:buNone/>
-                      </a:pPr>
-                      <a:r>
-                        <a:rPr/>
-                        <a:t>major</a:t>
-                      </a:r>
-                    </a:p>
-                  </a:txBody>
-                </a:tc>
-                <a:tc>
-                  <a:txBody>
-                    <a:bodyPr/>
-                    <a:lstStyle/>
-                    <a:p>
-                      <a:pPr lvl="0" indent="0" marL="0" algn="l">
-                        <a:buNone/>
-                      </a:pPr>
-                      <a:r>
-                        <a:rPr/>
-                        <a:t>High noise annoyance</a:t>
-                      </a:r>
-                    </a:p>
-                  </a:txBody>
-                </a:tc>
-                <a:tc>
-                  <a:txBody>
-                    <a:bodyPr/>
-                    <a:lstStyle/>
-                    <a:p>
-                      <a:pPr lvl="0" indent="0" marL="0" algn="r">
-                        <a:buNone/>
-                      </a:pPr>
-                      <a:r>
-                        <a:rPr/>
-                        <a:t>30</a:t>
-                      </a:r>
-                    </a:p>
-                  </a:txBody>
-                </a:tc>
-                <a:tc>
-                  <a:txBody>
-                    <a:bodyPr/>
-                    <a:lstStyle/>
-                    <a:p>
-                      <a:pPr lvl="0" indent="0" marL="0" algn="r">
-                        <a:buNone/>
-                      </a:pPr>
-                      <a:r>
-                        <a:rPr/>
-                        <a:t>6336</a:t>
+                        <a:t>air</a:t>
+                      </a:r>
+                    </a:p>
+                  </a:txBody>
+                </a:tc>
+                <a:tc>
+                  <a:txBody>
+                    <a:bodyPr/>
+                    <a:lstStyle/>
+                    <a:p>
+                      <a:pPr lvl="0" indent="0" marL="0" algn="l">
+                        <a:buNone/>
+                      </a:pPr>
+                      <a:r>
+                        <a:rPr/>
+                        <a:t>EEA</a:t>
+                      </a:r>
+                    </a:p>
+                  </a:txBody>
+                </a:tc>
+                <a:tc>
+                  <a:txBody>
+                    <a:bodyPr/>
+                    <a:lstStyle/>
+                    <a:p>
+                      <a:pPr lvl="0" indent="0" marL="0" algn="l">
+                        <a:buNone/>
+                      </a:pPr>
+                      <a:r>
+                        <a:rPr/>
+                        <a:t>all</a:t>
+                      </a:r>
+                    </a:p>
+                  </a:txBody>
+                </a:tc>
+                <a:tc>
+                  <a:txBody>
+                    <a:bodyPr/>
+                    <a:lstStyle/>
+                    <a:p>
+                      <a:pPr lvl="0" indent="0" marL="0" algn="l">
+                        <a:buNone/>
+                      </a:pPr>
+                      <a:r>
+                        <a:rPr/>
+                        <a:t>All-cause mortality</a:t>
+                      </a:r>
+                    </a:p>
+                  </a:txBody>
+                </a:tc>
+                <a:tc>
+                  <a:txBody>
+                    <a:bodyPr/>
+                    <a:lstStyle/>
+                    <a:p>
+                      <a:pPr lvl="0" indent="0" marL="0" algn="r">
+                        <a:buNone/>
+                      </a:pPr>
+                      <a:r>
+                        <a:rPr/>
+                        <a:t>360</a:t>
+                      </a:r>
+                    </a:p>
+                  </a:txBody>
+                </a:tc>
+                <a:tc>
+                  <a:txBody>
+                    <a:bodyPr/>
+                    <a:lstStyle/>
+                    <a:p>
+                      <a:pPr lvl="0" indent="0" marL="0" algn="r">
+                        <a:buNone/>
+                      </a:pPr>
+                      <a:r>
+                        <a:rPr/>
+                        <a:t>474800</a:t>
                       </a:r>
                     </a:p>
                   </a:txBody>
@@ -4369,6 +4370,1018 @@
                       </a:pPr>
                       <a:r>
                         <a:rPr/>
+                        <a:t>air</a:t>
+                      </a:r>
+                    </a:p>
+                  </a:txBody>
+                </a:tc>
+                <a:tc>
+                  <a:txBody>
+                    <a:bodyPr/>
+                    <a:lstStyle/>
+                    <a:p>
+                      <a:pPr lvl="0" indent="0" marL="0" algn="l">
+                        <a:buNone/>
+                      </a:pPr>
+                      <a:r>
+                        <a:rPr/>
+                        <a:t>EEA</a:t>
+                      </a:r>
+                    </a:p>
+                  </a:txBody>
+                </a:tc>
+                <a:tc>
+                  <a:txBody>
+                    <a:bodyPr/>
+                    <a:lstStyle/>
+                    <a:p>
+                      <a:pPr lvl="0" indent="0" marL="0" algn="l">
+                        <a:buNone/>
+                      </a:pPr>
+                      <a:r>
+                        <a:rPr/>
+                        <a:t>all</a:t>
+                      </a:r>
+                    </a:p>
+                  </a:txBody>
+                </a:tc>
+                <a:tc>
+                  <a:txBody>
+                    <a:bodyPr/>
+                    <a:lstStyle/>
+                    <a:p>
+                      <a:pPr lvl="0" indent="0" marL="0" algn="l">
+                        <a:buNone/>
+                      </a:pPr>
+                      <a:r>
+                        <a:rPr/>
+                        <a:t>Cardiovascular disease</a:t>
+                      </a:r>
+                    </a:p>
+                  </a:txBody>
+                </a:tc>
+                <a:tc>
+                  <a:txBody>
+                    <a:bodyPr/>
+                    <a:lstStyle/>
+                    <a:p>
+                      <a:pPr lvl="0" indent="0" marL="0" algn="r">
+                        <a:buNone/>
+                      </a:pPr>
+                      <a:r>
+                        <a:rPr/>
+                        <a:t>360</a:t>
+                      </a:r>
+                    </a:p>
+                  </a:txBody>
+                </a:tc>
+                <a:tc>
+                  <a:txBody>
+                    <a:bodyPr/>
+                    <a:lstStyle/>
+                    <a:p>
+                      <a:pPr lvl="0" indent="0" marL="0" algn="r">
+                        <a:buNone/>
+                      </a:pPr>
+                      <a:r>
+                        <a:rPr/>
+                        <a:t>474800</a:t>
+                      </a:r>
+                    </a:p>
+                  </a:txBody>
+                </a:tc>
+              </a:tr>
+              <a:tr h="0">
+                <a:tc>
+                  <a:txBody>
+                    <a:bodyPr/>
+                    <a:lstStyle/>
+                    <a:p>
+                      <a:pPr lvl="0" indent="0" marL="0" algn="l">
+                        <a:buNone/>
+                      </a:pPr>
+                      <a:r>
+                        <a:rPr/>
+                        <a:t>air</a:t>
+                      </a:r>
+                    </a:p>
+                  </a:txBody>
+                </a:tc>
+                <a:tc>
+                  <a:txBody>
+                    <a:bodyPr/>
+                    <a:lstStyle/>
+                    <a:p>
+                      <a:pPr lvl="0" indent="0" marL="0" algn="l">
+                        <a:buNone/>
+                      </a:pPr>
+                      <a:r>
+                        <a:rPr/>
+                        <a:t>EEA</a:t>
+                      </a:r>
+                    </a:p>
+                  </a:txBody>
+                </a:tc>
+                <a:tc>
+                  <a:txBody>
+                    <a:bodyPr/>
+                    <a:lstStyle/>
+                    <a:p>
+                      <a:pPr lvl="0" indent="0" marL="0" algn="l">
+                        <a:buNone/>
+                      </a:pPr>
+                      <a:r>
+                        <a:rPr/>
+                        <a:t>all</a:t>
+                      </a:r>
+                    </a:p>
+                  </a:txBody>
+                </a:tc>
+                <a:tc>
+                  <a:txBody>
+                    <a:bodyPr/>
+                    <a:lstStyle/>
+                    <a:p>
+                      <a:pPr lvl="0" indent="0" marL="0" algn="l">
+                        <a:buNone/>
+                      </a:pPr>
+                      <a:r>
+                        <a:rPr/>
+                        <a:t>Diabetes</a:t>
+                      </a:r>
+                    </a:p>
+                  </a:txBody>
+                </a:tc>
+                <a:tc>
+                  <a:txBody>
+                    <a:bodyPr/>
+                    <a:lstStyle/>
+                    <a:p>
+                      <a:pPr lvl="0" indent="0" marL="0" algn="r">
+                        <a:buNone/>
+                      </a:pPr>
+                      <a:r>
+                        <a:rPr/>
+                        <a:t>360</a:t>
+                      </a:r>
+                    </a:p>
+                  </a:txBody>
+                </a:tc>
+                <a:tc>
+                  <a:txBody>
+                    <a:bodyPr/>
+                    <a:lstStyle/>
+                    <a:p>
+                      <a:pPr lvl="0" indent="0" marL="0" algn="r">
+                        <a:buNone/>
+                      </a:pPr>
+                      <a:r>
+                        <a:rPr/>
+                        <a:t>474800</a:t>
+                      </a:r>
+                    </a:p>
+                  </a:txBody>
+                </a:tc>
+              </a:tr>
+              <a:tr h="0">
+                <a:tc>
+                  <a:txBody>
+                    <a:bodyPr/>
+                    <a:lstStyle/>
+                    <a:p>
+                      <a:pPr lvl="0" indent="0" marL="0" algn="l">
+                        <a:buNone/>
+                      </a:pPr>
+                      <a:r>
+                        <a:rPr/>
+                        <a:t>air</a:t>
+                      </a:r>
+                    </a:p>
+                  </a:txBody>
+                </a:tc>
+                <a:tc>
+                  <a:txBody>
+                    <a:bodyPr/>
+                    <a:lstStyle/>
+                    <a:p>
+                      <a:pPr lvl="0" indent="0" marL="0" algn="l">
+                        <a:buNone/>
+                      </a:pPr>
+                      <a:r>
+                        <a:rPr/>
+                        <a:t>EEA</a:t>
+                      </a:r>
+                    </a:p>
+                  </a:txBody>
+                </a:tc>
+                <a:tc>
+                  <a:txBody>
+                    <a:bodyPr/>
+                    <a:lstStyle/>
+                    <a:p>
+                      <a:pPr lvl="0" indent="0" marL="0" algn="l">
+                        <a:buNone/>
+                      </a:pPr>
+                      <a:r>
+                        <a:rPr/>
+                        <a:t>all</a:t>
+                      </a:r>
+                    </a:p>
+                  </a:txBody>
+                </a:tc>
+                <a:tc>
+                  <a:txBody>
+                    <a:bodyPr/>
+                    <a:lstStyle/>
+                    <a:p>
+                      <a:pPr lvl="0" indent="0" marL="0" algn="l">
+                        <a:buNone/>
+                      </a:pPr>
+                      <a:r>
+                        <a:rPr/>
+                        <a:t>High noise annoyance</a:t>
+                      </a:r>
+                    </a:p>
+                  </a:txBody>
+                </a:tc>
+                <a:tc>
+                  <a:txBody>
+                    <a:bodyPr/>
+                    <a:lstStyle/>
+                    <a:p>
+                      <a:pPr lvl="0" indent="0" marL="0" algn="r">
+                        <a:buNone/>
+                      </a:pPr>
+                      <a:r>
+                        <a:rPr/>
+                        <a:t>360</a:t>
+                      </a:r>
+                    </a:p>
+                  </a:txBody>
+                </a:tc>
+                <a:tc>
+                  <a:txBody>
+                    <a:bodyPr/>
+                    <a:lstStyle/>
+                    <a:p>
+                      <a:pPr lvl="0" indent="0" marL="0" algn="r">
+                        <a:buNone/>
+                      </a:pPr>
+                      <a:r>
+                        <a:rPr/>
+                        <a:t>474800</a:t>
+                      </a:r>
+                    </a:p>
+                  </a:txBody>
+                </a:tc>
+              </a:tr>
+              <a:tr h="0">
+                <a:tc>
+                  <a:txBody>
+                    <a:bodyPr/>
+                    <a:lstStyle/>
+                    <a:p>
+                      <a:pPr lvl="0" indent="0" marL="0" algn="l">
+                        <a:buNone/>
+                      </a:pPr>
+                      <a:r>
+                        <a:rPr/>
+                        <a:t>air</a:t>
+                      </a:r>
+                    </a:p>
+                  </a:txBody>
+                </a:tc>
+                <a:tc>
+                  <a:txBody>
+                    <a:bodyPr/>
+                    <a:lstStyle/>
+                    <a:p>
+                      <a:pPr lvl="0" indent="0" marL="0" algn="l">
+                        <a:buNone/>
+                      </a:pPr>
+                      <a:r>
+                        <a:rPr/>
+                        <a:t>EEA</a:t>
+                      </a:r>
+                    </a:p>
+                  </a:txBody>
+                </a:tc>
+                <a:tc>
+                  <a:txBody>
+                    <a:bodyPr/>
+                    <a:lstStyle/>
+                    <a:p>
+                      <a:pPr lvl="0" indent="0" marL="0" algn="l">
+                        <a:buNone/>
+                      </a:pPr>
+                      <a:r>
+                        <a:rPr/>
+                        <a:t>all</a:t>
+                      </a:r>
+                    </a:p>
+                  </a:txBody>
+                </a:tc>
+                <a:tc>
+                  <a:txBody>
+                    <a:bodyPr/>
+                    <a:lstStyle/>
+                    <a:p>
+                      <a:pPr lvl="0" indent="0" marL="0" algn="l">
+                        <a:buNone/>
+                      </a:pPr>
+                      <a:r>
+                        <a:rPr/>
+                        <a:t>High sleep disturbance</a:t>
+                      </a:r>
+                    </a:p>
+                  </a:txBody>
+                </a:tc>
+                <a:tc>
+                  <a:txBody>
+                    <a:bodyPr/>
+                    <a:lstStyle/>
+                    <a:p>
+                      <a:pPr lvl="0" indent="0" marL="0" algn="r">
+                        <a:buNone/>
+                      </a:pPr>
+                      <a:r>
+                        <a:rPr/>
+                        <a:t>360</a:t>
+                      </a:r>
+                    </a:p>
+                  </a:txBody>
+                </a:tc>
+                <a:tc>
+                  <a:txBody>
+                    <a:bodyPr/>
+                    <a:lstStyle/>
+                    <a:p>
+                      <a:pPr lvl="0" indent="0" marL="0" algn="r">
+                        <a:buNone/>
+                      </a:pPr>
+                      <a:r>
+                        <a:rPr/>
+                        <a:t>132400</a:t>
+                      </a:r>
+                    </a:p>
+                  </a:txBody>
+                </a:tc>
+              </a:tr>
+              <a:tr h="0">
+                <a:tc>
+                  <a:txBody>
+                    <a:bodyPr/>
+                    <a:lstStyle/>
+                    <a:p>
+                      <a:pPr lvl="0" indent="0" marL="0" algn="l">
+                        <a:buNone/>
+                      </a:pPr>
+                      <a:r>
+                        <a:rPr/>
+                        <a:t>air</a:t>
+                      </a:r>
+                    </a:p>
+                  </a:txBody>
+                </a:tc>
+                <a:tc>
+                  <a:txBody>
+                    <a:bodyPr/>
+                    <a:lstStyle/>
+                    <a:p>
+                      <a:pPr lvl="0" indent="0" marL="0" algn="l">
+                        <a:buNone/>
+                      </a:pPr>
+                      <a:r>
+                        <a:rPr/>
+                        <a:t>EEA</a:t>
+                      </a:r>
+                    </a:p>
+                  </a:txBody>
+                </a:tc>
+                <a:tc>
+                  <a:txBody>
+                    <a:bodyPr/>
+                    <a:lstStyle/>
+                    <a:p>
+                      <a:pPr lvl="0" indent="0" marL="0" algn="l">
+                        <a:buNone/>
+                      </a:pPr>
+                      <a:r>
+                        <a:rPr/>
+                        <a:t>all</a:t>
+                      </a:r>
+                    </a:p>
+                  </a:txBody>
+                </a:tc>
+                <a:tc>
+                  <a:txBody>
+                    <a:bodyPr/>
+                    <a:lstStyle/>
+                    <a:p>
+                      <a:pPr lvl="0" indent="0" marL="0" algn="l">
+                        <a:buNone/>
+                      </a:pPr>
+                      <a:r>
+                        <a:rPr/>
+                        <a:t>Reading Comprehension</a:t>
+                      </a:r>
+                    </a:p>
+                  </a:txBody>
+                </a:tc>
+                <a:tc>
+                  <a:txBody>
+                    <a:bodyPr/>
+                    <a:lstStyle/>
+                    <a:p>
+                      <a:pPr lvl="0" indent="0" marL="0" algn="r">
+                        <a:buNone/>
+                      </a:pPr>
+                      <a:r>
+                        <a:rPr/>
+                        <a:t>360</a:t>
+                      </a:r>
+                    </a:p>
+                  </a:txBody>
+                </a:tc>
+                <a:tc>
+                  <a:txBody>
+                    <a:bodyPr/>
+                    <a:lstStyle/>
+                    <a:p>
+                      <a:pPr lvl="0" indent="0" marL="0" algn="r">
+                        <a:buNone/>
+                      </a:pPr>
+                      <a:r>
+                        <a:rPr/>
+                        <a:t>474800</a:t>
+                      </a:r>
+                    </a:p>
+                  </a:txBody>
+                </a:tc>
+              </a:tr>
+              <a:tr h="0">
+                <a:tc>
+                  <a:txBody>
+                    <a:bodyPr/>
+                    <a:lstStyle/>
+                    <a:p>
+                      <a:pPr lvl="0" indent="0" marL="0" algn="l">
+                        <a:buNone/>
+                      </a:pPr>
+                      <a:r>
+                        <a:rPr/>
+                        <a:t>air</a:t>
+                      </a:r>
+                    </a:p>
+                  </a:txBody>
+                </a:tc>
+                <a:tc>
+                  <a:txBody>
+                    <a:bodyPr/>
+                    <a:lstStyle/>
+                    <a:p>
+                      <a:pPr lvl="0" indent="0" marL="0" algn="l">
+                        <a:buNone/>
+                      </a:pPr>
+                      <a:r>
+                        <a:rPr/>
+                        <a:t>EEA</a:t>
+                      </a:r>
+                    </a:p>
+                  </a:txBody>
+                </a:tc>
+                <a:tc>
+                  <a:txBody>
+                    <a:bodyPr/>
+                    <a:lstStyle/>
+                    <a:p>
+                      <a:pPr lvl="0" indent="0" marL="0" algn="l">
+                        <a:buNone/>
+                      </a:pPr>
+                      <a:r>
+                        <a:rPr/>
+                        <a:t>major</a:t>
+                      </a:r>
+                    </a:p>
+                  </a:txBody>
+                </a:tc>
+                <a:tc>
+                  <a:txBody>
+                    <a:bodyPr/>
+                    <a:lstStyle/>
+                    <a:p>
+                      <a:pPr lvl="0" indent="0" marL="0" algn="l">
+                        <a:buNone/>
+                      </a:pPr>
+                      <a:r>
+                        <a:rPr/>
+                        <a:t>All-cause mortality</a:t>
+                      </a:r>
+                    </a:p>
+                  </a:txBody>
+                </a:tc>
+                <a:tc>
+                  <a:txBody>
+                    <a:bodyPr/>
+                    <a:lstStyle/>
+                    <a:p>
+                      <a:pPr lvl="0" indent="0" marL="0" algn="r">
+                        <a:buNone/>
+                      </a:pPr>
+                      <a:r>
+                        <a:rPr/>
+                        <a:t>360</a:t>
+                      </a:r>
+                    </a:p>
+                  </a:txBody>
+                </a:tc>
+                <a:tc>
+                  <a:txBody>
+                    <a:bodyPr/>
+                    <a:lstStyle/>
+                    <a:p>
+                      <a:pPr lvl="0" indent="0" marL="0" algn="r">
+                        <a:buNone/>
+                      </a:pPr>
+                      <a:r>
+                        <a:rPr/>
+                        <a:t>456300</a:t>
+                      </a:r>
+                    </a:p>
+                  </a:txBody>
+                </a:tc>
+              </a:tr>
+              <a:tr h="0">
+                <a:tc>
+                  <a:txBody>
+                    <a:bodyPr/>
+                    <a:lstStyle/>
+                    <a:p>
+                      <a:pPr lvl="0" indent="0" marL="0" algn="l">
+                        <a:buNone/>
+                      </a:pPr>
+                      <a:r>
+                        <a:rPr/>
+                        <a:t>air</a:t>
+                      </a:r>
+                    </a:p>
+                  </a:txBody>
+                </a:tc>
+                <a:tc>
+                  <a:txBody>
+                    <a:bodyPr/>
+                    <a:lstStyle/>
+                    <a:p>
+                      <a:pPr lvl="0" indent="0" marL="0" algn="l">
+                        <a:buNone/>
+                      </a:pPr>
+                      <a:r>
+                        <a:rPr/>
+                        <a:t>EEA</a:t>
+                      </a:r>
+                    </a:p>
+                  </a:txBody>
+                </a:tc>
+                <a:tc>
+                  <a:txBody>
+                    <a:bodyPr/>
+                    <a:lstStyle/>
+                    <a:p>
+                      <a:pPr lvl="0" indent="0" marL="0" algn="l">
+                        <a:buNone/>
+                      </a:pPr>
+                      <a:r>
+                        <a:rPr/>
+                        <a:t>major</a:t>
+                      </a:r>
+                    </a:p>
+                  </a:txBody>
+                </a:tc>
+                <a:tc>
+                  <a:txBody>
+                    <a:bodyPr/>
+                    <a:lstStyle/>
+                    <a:p>
+                      <a:pPr lvl="0" indent="0" marL="0" algn="l">
+                        <a:buNone/>
+                      </a:pPr>
+                      <a:r>
+                        <a:rPr/>
+                        <a:t>Cardiovascular disease</a:t>
+                      </a:r>
+                    </a:p>
+                  </a:txBody>
+                </a:tc>
+                <a:tc>
+                  <a:txBody>
+                    <a:bodyPr/>
+                    <a:lstStyle/>
+                    <a:p>
+                      <a:pPr lvl="0" indent="0" marL="0" algn="r">
+                        <a:buNone/>
+                      </a:pPr>
+                      <a:r>
+                        <a:rPr/>
+                        <a:t>360</a:t>
+                      </a:r>
+                    </a:p>
+                  </a:txBody>
+                </a:tc>
+                <a:tc>
+                  <a:txBody>
+                    <a:bodyPr/>
+                    <a:lstStyle/>
+                    <a:p>
+                      <a:pPr lvl="0" indent="0" marL="0" algn="r">
+                        <a:buNone/>
+                      </a:pPr>
+                      <a:r>
+                        <a:rPr/>
+                        <a:t>456300</a:t>
+                      </a:r>
+                    </a:p>
+                  </a:txBody>
+                </a:tc>
+              </a:tr>
+              <a:tr h="0">
+                <a:tc>
+                  <a:txBody>
+                    <a:bodyPr/>
+                    <a:lstStyle/>
+                    <a:p>
+                      <a:pPr lvl="0" indent="0" marL="0" algn="l">
+                        <a:buNone/>
+                      </a:pPr>
+                      <a:r>
+                        <a:rPr/>
+                        <a:t>air</a:t>
+                      </a:r>
+                    </a:p>
+                  </a:txBody>
+                </a:tc>
+                <a:tc>
+                  <a:txBody>
+                    <a:bodyPr/>
+                    <a:lstStyle/>
+                    <a:p>
+                      <a:pPr lvl="0" indent="0" marL="0" algn="l">
+                        <a:buNone/>
+                      </a:pPr>
+                      <a:r>
+                        <a:rPr/>
+                        <a:t>EEA</a:t>
+                      </a:r>
+                    </a:p>
+                  </a:txBody>
+                </a:tc>
+                <a:tc>
+                  <a:txBody>
+                    <a:bodyPr/>
+                    <a:lstStyle/>
+                    <a:p>
+                      <a:pPr lvl="0" indent="0" marL="0" algn="l">
+                        <a:buNone/>
+                      </a:pPr>
+                      <a:r>
+                        <a:rPr/>
+                        <a:t>major</a:t>
+                      </a:r>
+                    </a:p>
+                  </a:txBody>
+                </a:tc>
+                <a:tc>
+                  <a:txBody>
+                    <a:bodyPr/>
+                    <a:lstStyle/>
+                    <a:p>
+                      <a:pPr lvl="0" indent="0" marL="0" algn="l">
+                        <a:buNone/>
+                      </a:pPr>
+                      <a:r>
+                        <a:rPr/>
+                        <a:t>Diabetes</a:t>
+                      </a:r>
+                    </a:p>
+                  </a:txBody>
+                </a:tc>
+                <a:tc>
+                  <a:txBody>
+                    <a:bodyPr/>
+                    <a:lstStyle/>
+                    <a:p>
+                      <a:pPr lvl="0" indent="0" marL="0" algn="r">
+                        <a:buNone/>
+                      </a:pPr>
+                      <a:r>
+                        <a:rPr/>
+                        <a:t>360</a:t>
+                      </a:r>
+                    </a:p>
+                  </a:txBody>
+                </a:tc>
+                <a:tc>
+                  <a:txBody>
+                    <a:bodyPr/>
+                    <a:lstStyle/>
+                    <a:p>
+                      <a:pPr lvl="0" indent="0" marL="0" algn="r">
+                        <a:buNone/>
+                      </a:pPr>
+                      <a:r>
+                        <a:rPr/>
+                        <a:t>456300</a:t>
+                      </a:r>
+                    </a:p>
+                  </a:txBody>
+                </a:tc>
+              </a:tr>
+              <a:tr h="0">
+                <a:tc>
+                  <a:txBody>
+                    <a:bodyPr/>
+                    <a:lstStyle/>
+                    <a:p>
+                      <a:pPr lvl="0" indent="0" marL="0" algn="l">
+                        <a:buNone/>
+                      </a:pPr>
+                      <a:r>
+                        <a:rPr/>
+                        <a:t>air</a:t>
+                      </a:r>
+                    </a:p>
+                  </a:txBody>
+                </a:tc>
+                <a:tc>
+                  <a:txBody>
+                    <a:bodyPr/>
+                    <a:lstStyle/>
+                    <a:p>
+                      <a:pPr lvl="0" indent="0" marL="0" algn="l">
+                        <a:buNone/>
+                      </a:pPr>
+                      <a:r>
+                        <a:rPr/>
+                        <a:t>EEA</a:t>
+                      </a:r>
+                    </a:p>
+                  </a:txBody>
+                </a:tc>
+                <a:tc>
+                  <a:txBody>
+                    <a:bodyPr/>
+                    <a:lstStyle/>
+                    <a:p>
+                      <a:pPr lvl="0" indent="0" marL="0" algn="l">
+                        <a:buNone/>
+                      </a:pPr>
+                      <a:r>
+                        <a:rPr/>
+                        <a:t>major</a:t>
+                      </a:r>
+                    </a:p>
+                  </a:txBody>
+                </a:tc>
+                <a:tc>
+                  <a:txBody>
+                    <a:bodyPr/>
+                    <a:lstStyle/>
+                    <a:p>
+                      <a:pPr lvl="0" indent="0" marL="0" algn="l">
+                        <a:buNone/>
+                      </a:pPr>
+                      <a:r>
+                        <a:rPr/>
+                        <a:t>High noise annoyance</a:t>
+                      </a:r>
+                    </a:p>
+                  </a:txBody>
+                </a:tc>
+                <a:tc>
+                  <a:txBody>
+                    <a:bodyPr/>
+                    <a:lstStyle/>
+                    <a:p>
+                      <a:pPr lvl="0" indent="0" marL="0" algn="r">
+                        <a:buNone/>
+                      </a:pPr>
+                      <a:r>
+                        <a:rPr/>
+                        <a:t>360</a:t>
+                      </a:r>
+                    </a:p>
+                  </a:txBody>
+                </a:tc>
+                <a:tc>
+                  <a:txBody>
+                    <a:bodyPr/>
+                    <a:lstStyle/>
+                    <a:p>
+                      <a:pPr lvl="0" indent="0" marL="0" algn="r">
+                        <a:buNone/>
+                      </a:pPr>
+                      <a:r>
+                        <a:rPr/>
+                        <a:t>456300</a:t>
+                      </a:r>
+                    </a:p>
+                  </a:txBody>
+                </a:tc>
+              </a:tr>
+              <a:tr h="0">
+                <a:tc>
+                  <a:txBody>
+                    <a:bodyPr/>
+                    <a:lstStyle/>
+                    <a:p>
+                      <a:pPr lvl="0" indent="0" marL="0" algn="l">
+                        <a:buNone/>
+                      </a:pPr>
+                      <a:r>
+                        <a:rPr/>
+                        <a:t>air</a:t>
+                      </a:r>
+                    </a:p>
+                  </a:txBody>
+                </a:tc>
+                <a:tc>
+                  <a:txBody>
+                    <a:bodyPr/>
+                    <a:lstStyle/>
+                    <a:p>
+                      <a:pPr lvl="0" indent="0" marL="0" algn="l">
+                        <a:buNone/>
+                      </a:pPr>
+                      <a:r>
+                        <a:rPr/>
+                        <a:t>EEA</a:t>
+                      </a:r>
+                    </a:p>
+                  </a:txBody>
+                </a:tc>
+                <a:tc>
+                  <a:txBody>
+                    <a:bodyPr/>
+                    <a:lstStyle/>
+                    <a:p>
+                      <a:pPr lvl="0" indent="0" marL="0" algn="l">
+                        <a:buNone/>
+                      </a:pPr>
+                      <a:r>
+                        <a:rPr/>
+                        <a:t>major</a:t>
+                      </a:r>
+                    </a:p>
+                  </a:txBody>
+                </a:tc>
+                <a:tc>
+                  <a:txBody>
+                    <a:bodyPr/>
+                    <a:lstStyle/>
+                    <a:p>
+                      <a:pPr lvl="0" indent="0" marL="0" algn="l">
+                        <a:buNone/>
+                      </a:pPr>
+                      <a:r>
+                        <a:rPr/>
+                        <a:t>High sleep disturbance</a:t>
+                      </a:r>
+                    </a:p>
+                  </a:txBody>
+                </a:tc>
+                <a:tc>
+                  <a:txBody>
+                    <a:bodyPr/>
+                    <a:lstStyle/>
+                    <a:p>
+                      <a:pPr lvl="0" indent="0" marL="0" algn="r">
+                        <a:buNone/>
+                      </a:pPr>
+                      <a:r>
+                        <a:rPr/>
+                        <a:t>360</a:t>
+                      </a:r>
+                    </a:p>
+                  </a:txBody>
+                </a:tc>
+                <a:tc>
+                  <a:txBody>
+                    <a:bodyPr/>
+                    <a:lstStyle/>
+                    <a:p>
+                      <a:pPr lvl="0" indent="0" marL="0" algn="r">
+                        <a:buNone/>
+                      </a:pPr>
+                      <a:r>
+                        <a:rPr/>
+                        <a:t>131200</a:t>
+                      </a:r>
+                    </a:p>
+                  </a:txBody>
+                </a:tc>
+              </a:tr>
+              <a:tr h="0">
+                <a:tc>
+                  <a:txBody>
+                    <a:bodyPr/>
+                    <a:lstStyle/>
+                    <a:p>
+                      <a:pPr lvl="0" indent="0" marL="0" algn="l">
+                        <a:buNone/>
+                      </a:pPr>
+                      <a:r>
+                        <a:rPr/>
+                        <a:t>air</a:t>
+                      </a:r>
+                    </a:p>
+                  </a:txBody>
+                </a:tc>
+                <a:tc>
+                  <a:txBody>
+                    <a:bodyPr/>
+                    <a:lstStyle/>
+                    <a:p>
+                      <a:pPr lvl="0" indent="0" marL="0" algn="l">
+                        <a:buNone/>
+                      </a:pPr>
+                      <a:r>
+                        <a:rPr/>
+                        <a:t>EEA</a:t>
+                      </a:r>
+                    </a:p>
+                  </a:txBody>
+                </a:tc>
+                <a:tc>
+                  <a:txBody>
+                    <a:bodyPr/>
+                    <a:lstStyle/>
+                    <a:p>
+                      <a:pPr lvl="0" indent="0" marL="0" algn="l">
+                        <a:buNone/>
+                      </a:pPr>
+                      <a:r>
+                        <a:rPr/>
+                        <a:t>major</a:t>
+                      </a:r>
+                    </a:p>
+                  </a:txBody>
+                </a:tc>
+                <a:tc>
+                  <a:txBody>
+                    <a:bodyPr/>
+                    <a:lstStyle/>
+                    <a:p>
+                      <a:pPr lvl="0" indent="0" marL="0" algn="l">
+                        <a:buNone/>
+                      </a:pPr>
+                      <a:r>
+                        <a:rPr/>
+                        <a:t>Reading Comprehension</a:t>
+                      </a:r>
+                    </a:p>
+                  </a:txBody>
+                </a:tc>
+                <a:tc>
+                  <a:txBody>
+                    <a:bodyPr/>
+                    <a:lstStyle/>
+                    <a:p>
+                      <a:pPr lvl="0" indent="0" marL="0" algn="r">
+                        <a:buNone/>
+                      </a:pPr>
+                      <a:r>
+                        <a:rPr/>
+                        <a:t>360</a:t>
+                      </a:r>
+                    </a:p>
+                  </a:txBody>
+                </a:tc>
+                <a:tc>
+                  <a:txBody>
+                    <a:bodyPr/>
+                    <a:lstStyle/>
+                    <a:p>
+                      <a:pPr lvl="0" indent="0" marL="0" algn="r">
+                        <a:buNone/>
+                      </a:pPr>
+                      <a:r>
+                        <a:rPr/>
+                        <a:t>456300</a:t>
+                      </a:r>
+                    </a:p>
+                  </a:txBody>
+                </a:tc>
+              </a:tr>
+              <a:tr h="0">
+                <a:tc>
+                  <a:txBody>
+                    <a:bodyPr/>
+                    <a:lstStyle/>
+                    <a:p>
+                      <a:pPr lvl="0" indent="0" marL="0" algn="l">
+                        <a:buNone/>
+                      </a:pPr>
+                      <a:r>
+                        <a:rPr/>
                         <a:t>industry</a:t>
                       </a:r>
                     </a:p>
@@ -4414,6 +5427,98 @@
                       </a:pPr>
                       <a:r>
                         <a:rPr/>
+                        <a:t>High noise annoyance</a:t>
+                      </a:r>
+                    </a:p>
+                  </a:txBody>
+                </a:tc>
+                <a:tc>
+                  <a:txBody>
+                    <a:bodyPr/>
+                    <a:lstStyle/>
+                    <a:p>
+                      <a:pPr lvl="0" indent="0" marL="0" algn="r">
+                        <a:buNone/>
+                      </a:pPr>
+                      <a:r>
+                        <a:rPr/>
+                        <a:t>30</a:t>
+                      </a:r>
+                    </a:p>
+                  </a:txBody>
+                </a:tc>
+                <a:tc>
+                  <a:txBody>
+                    <a:bodyPr/>
+                    <a:lstStyle/>
+                    <a:p>
+                      <a:pPr lvl="0" indent="0" marL="0" algn="r">
+                        <a:buNone/>
+                      </a:pPr>
+                      <a:r>
+                        <a:rPr/>
+                        <a:t>6336</a:t>
+                      </a:r>
+                    </a:p>
+                  </a:txBody>
+                </a:tc>
+              </a:tr>
+              <a:tr h="0">
+                <a:tc>
+                  <a:txBody>
+                    <a:bodyPr/>
+                    <a:lstStyle/>
+                    <a:p>
+                      <a:pPr lvl="0" indent="0" marL="0" algn="l">
+                        <a:buNone/>
+                      </a:pPr>
+                      <a:r>
+                        <a:rPr/>
+                        <a:t>industry</a:t>
+                      </a:r>
+                    </a:p>
+                  </a:txBody>
+                </a:tc>
+                <a:tc>
+                  <a:txBody>
+                    <a:bodyPr/>
+                    <a:lstStyle/>
+                    <a:p>
+                      <a:pPr lvl="0" indent="0" marL="0" algn="l">
+                        <a:buNone/>
+                      </a:pPr>
+                      <a:r>
+                        <a:rPr/>
+                        <a:t>Bundesland</a:t>
+                      </a:r>
+                    </a:p>
+                  </a:txBody>
+                </a:tc>
+                <a:tc>
+                  <a:txBody>
+                    <a:bodyPr/>
+                    <a:lstStyle/>
+                    <a:p>
+                      <a:pPr lvl="0" indent="0" marL="0" algn="l">
+                        <a:buNone/>
+                      </a:pPr>
+                      <a:r>
+                        <a:rPr/>
+                        <a:t>major</a:t>
+                      </a:r>
+                    </a:p>
+                  </a:txBody>
+                </a:tc>
+                <a:tc>
+                  <a:txBody>
+                    <a:bodyPr/>
+                    <a:lstStyle/>
+                    <a:p>
+                      <a:pPr lvl="0" indent="0" marL="0" algn="l">
+                        <a:buNone/>
+                      </a:pPr>
+                      <a:r>
+                        <a:rPr/>
                         <a:t>High sleep disturbance</a:t>
                       </a:r>
                     </a:p>
@@ -4445,6 +5550,926 @@
                       <a:r>
                         <a:rPr/>
                         <a:t>4806</a:t>
+                      </a:r>
+                    </a:p>
+                  </a:txBody>
+                </a:tc>
+              </a:tr>
+              <a:tr h="0">
+                <a:tc>
+                  <a:txBody>
+                    <a:bodyPr/>
+                    <a:lstStyle/>
+                    <a:p>
+                      <a:pPr lvl="0" indent="0" marL="0" algn="l">
+                        <a:buNone/>
+                      </a:pPr>
+                      <a:r>
+                        <a:rPr/>
+                        <a:t>rail</a:t>
+                      </a:r>
+                    </a:p>
+                  </a:txBody>
+                </a:tc>
+                <a:tc>
+                  <a:txBody>
+                    <a:bodyPr/>
+                    <a:lstStyle/>
+                    <a:p>
+                      <a:pPr lvl="0" indent="0" marL="0" algn="l">
+                        <a:buNone/>
+                      </a:pPr>
+                      <a:r>
+                        <a:rPr/>
+                        <a:t>EEA</a:t>
+                      </a:r>
+                    </a:p>
+                  </a:txBody>
+                </a:tc>
+                <a:tc>
+                  <a:txBody>
+                    <a:bodyPr/>
+                    <a:lstStyle/>
+                    <a:p>
+                      <a:pPr lvl="0" indent="0" marL="0" algn="l">
+                        <a:buNone/>
+                      </a:pPr>
+                      <a:r>
+                        <a:rPr/>
+                        <a:t>all</a:t>
+                      </a:r>
+                    </a:p>
+                  </a:txBody>
+                </a:tc>
+                <a:tc>
+                  <a:txBody>
+                    <a:bodyPr/>
+                    <a:lstStyle/>
+                    <a:p>
+                      <a:pPr lvl="0" indent="0" marL="0" algn="l">
+                        <a:buNone/>
+                      </a:pPr>
+                      <a:r>
+                        <a:rPr/>
+                        <a:t>All-cause mortality</a:t>
+                      </a:r>
+                    </a:p>
+                  </a:txBody>
+                </a:tc>
+                <a:tc>
+                  <a:txBody>
+                    <a:bodyPr/>
+                    <a:lstStyle/>
+                    <a:p>
+                      <a:pPr lvl="0" indent="0" marL="0" algn="r">
+                        <a:buNone/>
+                      </a:pPr>
+                      <a:r>
+                        <a:rPr/>
+                        <a:t>360</a:t>
+                      </a:r>
+                    </a:p>
+                  </a:txBody>
+                </a:tc>
+                <a:tc>
+                  <a:txBody>
+                    <a:bodyPr/>
+                    <a:lstStyle/>
+                    <a:p>
+                      <a:pPr lvl="0" indent="0" marL="0" algn="r">
+                        <a:buNone/>
+                      </a:pPr>
+                      <a:r>
+                        <a:rPr/>
+                        <a:t>2531400</a:t>
+                      </a:r>
+                    </a:p>
+                  </a:txBody>
+                </a:tc>
+              </a:tr>
+              <a:tr h="0">
+                <a:tc>
+                  <a:txBody>
+                    <a:bodyPr/>
+                    <a:lstStyle/>
+                    <a:p>
+                      <a:pPr lvl="0" indent="0" marL="0" algn="l">
+                        <a:buNone/>
+                      </a:pPr>
+                      <a:r>
+                        <a:rPr/>
+                        <a:t>rail</a:t>
+                      </a:r>
+                    </a:p>
+                  </a:txBody>
+                </a:tc>
+                <a:tc>
+                  <a:txBody>
+                    <a:bodyPr/>
+                    <a:lstStyle/>
+                    <a:p>
+                      <a:pPr lvl="0" indent="0" marL="0" algn="l">
+                        <a:buNone/>
+                      </a:pPr>
+                      <a:r>
+                        <a:rPr/>
+                        <a:t>EEA</a:t>
+                      </a:r>
+                    </a:p>
+                  </a:txBody>
+                </a:tc>
+                <a:tc>
+                  <a:txBody>
+                    <a:bodyPr/>
+                    <a:lstStyle/>
+                    <a:p>
+                      <a:pPr lvl="0" indent="0" marL="0" algn="l">
+                        <a:buNone/>
+                      </a:pPr>
+                      <a:r>
+                        <a:rPr/>
+                        <a:t>all</a:t>
+                      </a:r>
+                    </a:p>
+                  </a:txBody>
+                </a:tc>
+                <a:tc>
+                  <a:txBody>
+                    <a:bodyPr/>
+                    <a:lstStyle/>
+                    <a:p>
+                      <a:pPr lvl="0" indent="0" marL="0" algn="l">
+                        <a:buNone/>
+                      </a:pPr>
+                      <a:r>
+                        <a:rPr/>
+                        <a:t>Cardiovascular disease</a:t>
+                      </a:r>
+                    </a:p>
+                  </a:txBody>
+                </a:tc>
+                <a:tc>
+                  <a:txBody>
+                    <a:bodyPr/>
+                    <a:lstStyle/>
+                    <a:p>
+                      <a:pPr lvl="0" indent="0" marL="0" algn="r">
+                        <a:buNone/>
+                      </a:pPr>
+                      <a:r>
+                        <a:rPr/>
+                        <a:t>360</a:t>
+                      </a:r>
+                    </a:p>
+                  </a:txBody>
+                </a:tc>
+                <a:tc>
+                  <a:txBody>
+                    <a:bodyPr/>
+                    <a:lstStyle/>
+                    <a:p>
+                      <a:pPr lvl="0" indent="0" marL="0" algn="r">
+                        <a:buNone/>
+                      </a:pPr>
+                      <a:r>
+                        <a:rPr/>
+                        <a:t>2531400</a:t>
+                      </a:r>
+                    </a:p>
+                  </a:txBody>
+                </a:tc>
+              </a:tr>
+              <a:tr h="0">
+                <a:tc>
+                  <a:txBody>
+                    <a:bodyPr/>
+                    <a:lstStyle/>
+                    <a:p>
+                      <a:pPr lvl="0" indent="0" marL="0" algn="l">
+                        <a:buNone/>
+                      </a:pPr>
+                      <a:r>
+                        <a:rPr/>
+                        <a:t>rail</a:t>
+                      </a:r>
+                    </a:p>
+                  </a:txBody>
+                </a:tc>
+                <a:tc>
+                  <a:txBody>
+                    <a:bodyPr/>
+                    <a:lstStyle/>
+                    <a:p>
+                      <a:pPr lvl="0" indent="0" marL="0" algn="l">
+                        <a:buNone/>
+                      </a:pPr>
+                      <a:r>
+                        <a:rPr/>
+                        <a:t>EEA</a:t>
+                      </a:r>
+                    </a:p>
+                  </a:txBody>
+                </a:tc>
+                <a:tc>
+                  <a:txBody>
+                    <a:bodyPr/>
+                    <a:lstStyle/>
+                    <a:p>
+                      <a:pPr lvl="0" indent="0" marL="0" algn="l">
+                        <a:buNone/>
+                      </a:pPr>
+                      <a:r>
+                        <a:rPr/>
+                        <a:t>all</a:t>
+                      </a:r>
+                    </a:p>
+                  </a:txBody>
+                </a:tc>
+                <a:tc>
+                  <a:txBody>
+                    <a:bodyPr/>
+                    <a:lstStyle/>
+                    <a:p>
+                      <a:pPr lvl="0" indent="0" marL="0" algn="l">
+                        <a:buNone/>
+                      </a:pPr>
+                      <a:r>
+                        <a:rPr/>
+                        <a:t>Diabetes</a:t>
+                      </a:r>
+                    </a:p>
+                  </a:txBody>
+                </a:tc>
+                <a:tc>
+                  <a:txBody>
+                    <a:bodyPr/>
+                    <a:lstStyle/>
+                    <a:p>
+                      <a:pPr lvl="0" indent="0" marL="0" algn="r">
+                        <a:buNone/>
+                      </a:pPr>
+                      <a:r>
+                        <a:rPr/>
+                        <a:t>360</a:t>
+                      </a:r>
+                    </a:p>
+                  </a:txBody>
+                </a:tc>
+                <a:tc>
+                  <a:txBody>
+                    <a:bodyPr/>
+                    <a:lstStyle/>
+                    <a:p>
+                      <a:pPr lvl="0" indent="0" marL="0" algn="r">
+                        <a:buNone/>
+                      </a:pPr>
+                      <a:r>
+                        <a:rPr/>
+                        <a:t>2531400</a:t>
+                      </a:r>
+                    </a:p>
+                  </a:txBody>
+                </a:tc>
+              </a:tr>
+              <a:tr h="0">
+                <a:tc>
+                  <a:txBody>
+                    <a:bodyPr/>
+                    <a:lstStyle/>
+                    <a:p>
+                      <a:pPr lvl="0" indent="0" marL="0" algn="l">
+                        <a:buNone/>
+                      </a:pPr>
+                      <a:r>
+                        <a:rPr/>
+                        <a:t>rail</a:t>
+                      </a:r>
+                    </a:p>
+                  </a:txBody>
+                </a:tc>
+                <a:tc>
+                  <a:txBody>
+                    <a:bodyPr/>
+                    <a:lstStyle/>
+                    <a:p>
+                      <a:pPr lvl="0" indent="0" marL="0" algn="l">
+                        <a:buNone/>
+                      </a:pPr>
+                      <a:r>
+                        <a:rPr/>
+                        <a:t>EEA</a:t>
+                      </a:r>
+                    </a:p>
+                  </a:txBody>
+                </a:tc>
+                <a:tc>
+                  <a:txBody>
+                    <a:bodyPr/>
+                    <a:lstStyle/>
+                    <a:p>
+                      <a:pPr lvl="0" indent="0" marL="0" algn="l">
+                        <a:buNone/>
+                      </a:pPr>
+                      <a:r>
+                        <a:rPr/>
+                        <a:t>all</a:t>
+                      </a:r>
+                    </a:p>
+                  </a:txBody>
+                </a:tc>
+                <a:tc>
+                  <a:txBody>
+                    <a:bodyPr/>
+                    <a:lstStyle/>
+                    <a:p>
+                      <a:pPr lvl="0" indent="0" marL="0" algn="l">
+                        <a:buNone/>
+                      </a:pPr>
+                      <a:r>
+                        <a:rPr/>
+                        <a:t>High noise annoyance</a:t>
+                      </a:r>
+                    </a:p>
+                  </a:txBody>
+                </a:tc>
+                <a:tc>
+                  <a:txBody>
+                    <a:bodyPr/>
+                    <a:lstStyle/>
+                    <a:p>
+                      <a:pPr lvl="0" indent="0" marL="0" algn="r">
+                        <a:buNone/>
+                      </a:pPr>
+                      <a:r>
+                        <a:rPr/>
+                        <a:t>360</a:t>
+                      </a:r>
+                    </a:p>
+                  </a:txBody>
+                </a:tc>
+                <a:tc>
+                  <a:txBody>
+                    <a:bodyPr/>
+                    <a:lstStyle/>
+                    <a:p>
+                      <a:pPr lvl="0" indent="0" marL="0" algn="r">
+                        <a:buNone/>
+                      </a:pPr>
+                      <a:r>
+                        <a:rPr/>
+                        <a:t>2531400</a:t>
+                      </a:r>
+                    </a:p>
+                  </a:txBody>
+                </a:tc>
+              </a:tr>
+              <a:tr h="0">
+                <a:tc>
+                  <a:txBody>
+                    <a:bodyPr/>
+                    <a:lstStyle/>
+                    <a:p>
+                      <a:pPr lvl="0" indent="0" marL="0" algn="l">
+                        <a:buNone/>
+                      </a:pPr>
+                      <a:r>
+                        <a:rPr/>
+                        <a:t>rail</a:t>
+                      </a:r>
+                    </a:p>
+                  </a:txBody>
+                </a:tc>
+                <a:tc>
+                  <a:txBody>
+                    <a:bodyPr/>
+                    <a:lstStyle/>
+                    <a:p>
+                      <a:pPr lvl="0" indent="0" marL="0" algn="l">
+                        <a:buNone/>
+                      </a:pPr>
+                      <a:r>
+                        <a:rPr/>
+                        <a:t>EEA</a:t>
+                      </a:r>
+                    </a:p>
+                  </a:txBody>
+                </a:tc>
+                <a:tc>
+                  <a:txBody>
+                    <a:bodyPr/>
+                    <a:lstStyle/>
+                    <a:p>
+                      <a:pPr lvl="0" indent="0" marL="0" algn="l">
+                        <a:buNone/>
+                      </a:pPr>
+                      <a:r>
+                        <a:rPr/>
+                        <a:t>all</a:t>
+                      </a:r>
+                    </a:p>
+                  </a:txBody>
+                </a:tc>
+                <a:tc>
+                  <a:txBody>
+                    <a:bodyPr/>
+                    <a:lstStyle/>
+                    <a:p>
+                      <a:pPr lvl="0" indent="0" marL="0" algn="l">
+                        <a:buNone/>
+                      </a:pPr>
+                      <a:r>
+                        <a:rPr/>
+                        <a:t>High sleep disturbance</a:t>
+                      </a:r>
+                    </a:p>
+                  </a:txBody>
+                </a:tc>
+                <a:tc>
+                  <a:txBody>
+                    <a:bodyPr/>
+                    <a:lstStyle/>
+                    <a:p>
+                      <a:pPr lvl="0" indent="0" marL="0" algn="r">
+                        <a:buNone/>
+                      </a:pPr>
+                      <a:r>
+                        <a:rPr/>
+                        <a:t>360</a:t>
+                      </a:r>
+                    </a:p>
+                  </a:txBody>
+                </a:tc>
+                <a:tc>
+                  <a:txBody>
+                    <a:bodyPr/>
+                    <a:lstStyle/>
+                    <a:p>
+                      <a:pPr lvl="0" indent="0" marL="0" algn="r">
+                        <a:buNone/>
+                      </a:pPr>
+                      <a:r>
+                        <a:rPr/>
+                        <a:t>1882700</a:t>
+                      </a:r>
+                    </a:p>
+                  </a:txBody>
+                </a:tc>
+              </a:tr>
+              <a:tr h="0">
+                <a:tc>
+                  <a:txBody>
+                    <a:bodyPr/>
+                    <a:lstStyle/>
+                    <a:p>
+                      <a:pPr lvl="0" indent="0" marL="0" algn="l">
+                        <a:buNone/>
+                      </a:pPr>
+                      <a:r>
+                        <a:rPr/>
+                        <a:t>rail</a:t>
+                      </a:r>
+                    </a:p>
+                  </a:txBody>
+                </a:tc>
+                <a:tc>
+                  <a:txBody>
+                    <a:bodyPr/>
+                    <a:lstStyle/>
+                    <a:p>
+                      <a:pPr lvl="0" indent="0" marL="0" algn="l">
+                        <a:buNone/>
+                      </a:pPr>
+                      <a:r>
+                        <a:rPr/>
+                        <a:t>EEA</a:t>
+                      </a:r>
+                    </a:p>
+                  </a:txBody>
+                </a:tc>
+                <a:tc>
+                  <a:txBody>
+                    <a:bodyPr/>
+                    <a:lstStyle/>
+                    <a:p>
+                      <a:pPr lvl="0" indent="0" marL="0" algn="l">
+                        <a:buNone/>
+                      </a:pPr>
+                      <a:r>
+                        <a:rPr/>
+                        <a:t>major</a:t>
+                      </a:r>
+                    </a:p>
+                  </a:txBody>
+                </a:tc>
+                <a:tc>
+                  <a:txBody>
+                    <a:bodyPr/>
+                    <a:lstStyle/>
+                    <a:p>
+                      <a:pPr lvl="0" indent="0" marL="0" algn="l">
+                        <a:buNone/>
+                      </a:pPr>
+                      <a:r>
+                        <a:rPr/>
+                        <a:t>All-cause mortality</a:t>
+                      </a:r>
+                    </a:p>
+                  </a:txBody>
+                </a:tc>
+                <a:tc>
+                  <a:txBody>
+                    <a:bodyPr/>
+                    <a:lstStyle/>
+                    <a:p>
+                      <a:pPr lvl="0" indent="0" marL="0" algn="r">
+                        <a:buNone/>
+                      </a:pPr>
+                      <a:r>
+                        <a:rPr/>
+                        <a:t>360</a:t>
+                      </a:r>
+                    </a:p>
+                  </a:txBody>
+                </a:tc>
+                <a:tc>
+                  <a:txBody>
+                    <a:bodyPr/>
+                    <a:lstStyle/>
+                    <a:p>
+                      <a:pPr lvl="0" indent="0" marL="0" algn="r">
+                        <a:buNone/>
+                      </a:pPr>
+                      <a:r>
+                        <a:rPr/>
+                        <a:t>1220100</a:t>
+                      </a:r>
+                    </a:p>
+                  </a:txBody>
+                </a:tc>
+              </a:tr>
+              <a:tr h="0">
+                <a:tc>
+                  <a:txBody>
+                    <a:bodyPr/>
+                    <a:lstStyle/>
+                    <a:p>
+                      <a:pPr lvl="0" indent="0" marL="0" algn="l">
+                        <a:buNone/>
+                      </a:pPr>
+                      <a:r>
+                        <a:rPr/>
+                        <a:t>rail</a:t>
+                      </a:r>
+                    </a:p>
+                  </a:txBody>
+                </a:tc>
+                <a:tc>
+                  <a:txBody>
+                    <a:bodyPr/>
+                    <a:lstStyle/>
+                    <a:p>
+                      <a:pPr lvl="0" indent="0" marL="0" algn="l">
+                        <a:buNone/>
+                      </a:pPr>
+                      <a:r>
+                        <a:rPr/>
+                        <a:t>EEA</a:t>
+                      </a:r>
+                    </a:p>
+                  </a:txBody>
+                </a:tc>
+                <a:tc>
+                  <a:txBody>
+                    <a:bodyPr/>
+                    <a:lstStyle/>
+                    <a:p>
+                      <a:pPr lvl="0" indent="0" marL="0" algn="l">
+                        <a:buNone/>
+                      </a:pPr>
+                      <a:r>
+                        <a:rPr/>
+                        <a:t>major</a:t>
+                      </a:r>
+                    </a:p>
+                  </a:txBody>
+                </a:tc>
+                <a:tc>
+                  <a:txBody>
+                    <a:bodyPr/>
+                    <a:lstStyle/>
+                    <a:p>
+                      <a:pPr lvl="0" indent="0" marL="0" algn="l">
+                        <a:buNone/>
+                      </a:pPr>
+                      <a:r>
+                        <a:rPr/>
+                        <a:t>Cardiovascular disease</a:t>
+                      </a:r>
+                    </a:p>
+                  </a:txBody>
+                </a:tc>
+                <a:tc>
+                  <a:txBody>
+                    <a:bodyPr/>
+                    <a:lstStyle/>
+                    <a:p>
+                      <a:pPr lvl="0" indent="0" marL="0" algn="r">
+                        <a:buNone/>
+                      </a:pPr>
+                      <a:r>
+                        <a:rPr/>
+                        <a:t>360</a:t>
+                      </a:r>
+                    </a:p>
+                  </a:txBody>
+                </a:tc>
+                <a:tc>
+                  <a:txBody>
+                    <a:bodyPr/>
+                    <a:lstStyle/>
+                    <a:p>
+                      <a:pPr lvl="0" indent="0" marL="0" algn="r">
+                        <a:buNone/>
+                      </a:pPr>
+                      <a:r>
+                        <a:rPr/>
+                        <a:t>1220100</a:t>
+                      </a:r>
+                    </a:p>
+                  </a:txBody>
+                </a:tc>
+              </a:tr>
+              <a:tr h="0">
+                <a:tc>
+                  <a:txBody>
+                    <a:bodyPr/>
+                    <a:lstStyle/>
+                    <a:p>
+                      <a:pPr lvl="0" indent="0" marL="0" algn="l">
+                        <a:buNone/>
+                      </a:pPr>
+                      <a:r>
+                        <a:rPr/>
+                        <a:t>rail</a:t>
+                      </a:r>
+                    </a:p>
+                  </a:txBody>
+                </a:tc>
+                <a:tc>
+                  <a:txBody>
+                    <a:bodyPr/>
+                    <a:lstStyle/>
+                    <a:p>
+                      <a:pPr lvl="0" indent="0" marL="0" algn="l">
+                        <a:buNone/>
+                      </a:pPr>
+                      <a:r>
+                        <a:rPr/>
+                        <a:t>EEA</a:t>
+                      </a:r>
+                    </a:p>
+                  </a:txBody>
+                </a:tc>
+                <a:tc>
+                  <a:txBody>
+                    <a:bodyPr/>
+                    <a:lstStyle/>
+                    <a:p>
+                      <a:pPr lvl="0" indent="0" marL="0" algn="l">
+                        <a:buNone/>
+                      </a:pPr>
+                      <a:r>
+                        <a:rPr/>
+                        <a:t>major</a:t>
+                      </a:r>
+                    </a:p>
+                  </a:txBody>
+                </a:tc>
+                <a:tc>
+                  <a:txBody>
+                    <a:bodyPr/>
+                    <a:lstStyle/>
+                    <a:p>
+                      <a:pPr lvl="0" indent="0" marL="0" algn="l">
+                        <a:buNone/>
+                      </a:pPr>
+                      <a:r>
+                        <a:rPr/>
+                        <a:t>Diabetes</a:t>
+                      </a:r>
+                    </a:p>
+                  </a:txBody>
+                </a:tc>
+                <a:tc>
+                  <a:txBody>
+                    <a:bodyPr/>
+                    <a:lstStyle/>
+                    <a:p>
+                      <a:pPr lvl="0" indent="0" marL="0" algn="r">
+                        <a:buNone/>
+                      </a:pPr>
+                      <a:r>
+                        <a:rPr/>
+                        <a:t>360</a:t>
+                      </a:r>
+                    </a:p>
+                  </a:txBody>
+                </a:tc>
+                <a:tc>
+                  <a:txBody>
+                    <a:bodyPr/>
+                    <a:lstStyle/>
+                    <a:p>
+                      <a:pPr lvl="0" indent="0" marL="0" algn="r">
+                        <a:buNone/>
+                      </a:pPr>
+                      <a:r>
+                        <a:rPr/>
+                        <a:t>1220100</a:t>
+                      </a:r>
+                    </a:p>
+                  </a:txBody>
+                </a:tc>
+              </a:tr>
+              <a:tr h="0">
+                <a:tc>
+                  <a:txBody>
+                    <a:bodyPr/>
+                    <a:lstStyle/>
+                    <a:p>
+                      <a:pPr lvl="0" indent="0" marL="0" algn="l">
+                        <a:buNone/>
+                      </a:pPr>
+                      <a:r>
+                        <a:rPr/>
+                        <a:t>rail</a:t>
+                      </a:r>
+                    </a:p>
+                  </a:txBody>
+                </a:tc>
+                <a:tc>
+                  <a:txBody>
+                    <a:bodyPr/>
+                    <a:lstStyle/>
+                    <a:p>
+                      <a:pPr lvl="0" indent="0" marL="0" algn="l">
+                        <a:buNone/>
+                      </a:pPr>
+                      <a:r>
+                        <a:rPr/>
+                        <a:t>EEA</a:t>
+                      </a:r>
+                    </a:p>
+                  </a:txBody>
+                </a:tc>
+                <a:tc>
+                  <a:txBody>
+                    <a:bodyPr/>
+                    <a:lstStyle/>
+                    <a:p>
+                      <a:pPr lvl="0" indent="0" marL="0" algn="l">
+                        <a:buNone/>
+                      </a:pPr>
+                      <a:r>
+                        <a:rPr/>
+                        <a:t>major</a:t>
+                      </a:r>
+                    </a:p>
+                  </a:txBody>
+                </a:tc>
+                <a:tc>
+                  <a:txBody>
+                    <a:bodyPr/>
+                    <a:lstStyle/>
+                    <a:p>
+                      <a:pPr lvl="0" indent="0" marL="0" algn="l">
+                        <a:buNone/>
+                      </a:pPr>
+                      <a:r>
+                        <a:rPr/>
+                        <a:t>High noise annoyance</a:t>
+                      </a:r>
+                    </a:p>
+                  </a:txBody>
+                </a:tc>
+                <a:tc>
+                  <a:txBody>
+                    <a:bodyPr/>
+                    <a:lstStyle/>
+                    <a:p>
+                      <a:pPr lvl="0" indent="0" marL="0" algn="r">
+                        <a:buNone/>
+                      </a:pPr>
+                      <a:r>
+                        <a:rPr/>
+                        <a:t>360</a:t>
+                      </a:r>
+                    </a:p>
+                  </a:txBody>
+                </a:tc>
+                <a:tc>
+                  <a:txBody>
+                    <a:bodyPr/>
+                    <a:lstStyle/>
+                    <a:p>
+                      <a:pPr lvl="0" indent="0" marL="0" algn="r">
+                        <a:buNone/>
+                      </a:pPr>
+                      <a:r>
+                        <a:rPr/>
+                        <a:t>1220100</a:t>
+                      </a:r>
+                    </a:p>
+                  </a:txBody>
+                </a:tc>
+              </a:tr>
+              <a:tr h="0">
+                <a:tc>
+                  <a:txBody>
+                    <a:bodyPr/>
+                    <a:lstStyle/>
+                    <a:p>
+                      <a:pPr lvl="0" indent="0" marL="0" algn="l">
+                        <a:buNone/>
+                      </a:pPr>
+                      <a:r>
+                        <a:rPr/>
+                        <a:t>rail</a:t>
+                      </a:r>
+                    </a:p>
+                  </a:txBody>
+                </a:tc>
+                <a:tc>
+                  <a:txBody>
+                    <a:bodyPr/>
+                    <a:lstStyle/>
+                    <a:p>
+                      <a:pPr lvl="0" indent="0" marL="0" algn="l">
+                        <a:buNone/>
+                      </a:pPr>
+                      <a:r>
+                        <a:rPr/>
+                        <a:t>EEA</a:t>
+                      </a:r>
+                    </a:p>
+                  </a:txBody>
+                </a:tc>
+                <a:tc>
+                  <a:txBody>
+                    <a:bodyPr/>
+                    <a:lstStyle/>
+                    <a:p>
+                      <a:pPr lvl="0" indent="0" marL="0" algn="l">
+                        <a:buNone/>
+                      </a:pPr>
+                      <a:r>
+                        <a:rPr/>
+                        <a:t>major</a:t>
+                      </a:r>
+                    </a:p>
+                  </a:txBody>
+                </a:tc>
+                <a:tc>
+                  <a:txBody>
+                    <a:bodyPr/>
+                    <a:lstStyle/>
+                    <a:p>
+                      <a:pPr lvl="0" indent="0" marL="0" algn="l">
+                        <a:buNone/>
+                      </a:pPr>
+                      <a:r>
+                        <a:rPr/>
+                        <a:t>High sleep disturbance</a:t>
+                      </a:r>
+                    </a:p>
+                  </a:txBody>
+                </a:tc>
+                <a:tc>
+                  <a:txBody>
+                    <a:bodyPr/>
+                    <a:lstStyle/>
+                    <a:p>
+                      <a:pPr lvl="0" indent="0" marL="0" algn="r">
+                        <a:buNone/>
+                      </a:pPr>
+                      <a:r>
+                        <a:rPr/>
+                        <a:t>360</a:t>
+                      </a:r>
+                    </a:p>
+                  </a:txBody>
+                </a:tc>
+                <a:tc>
+                  <a:txBody>
+                    <a:bodyPr/>
+                    <a:lstStyle/>
+                    <a:p>
+                      <a:pPr lvl="0" indent="0" marL="0" algn="r">
+                        <a:buNone/>
+                      </a:pPr>
+                      <a:r>
+                        <a:rPr/>
+                        <a:t>935700</a:t>
                       </a:r>
                     </a:p>
                   </a:txBody>
@@ -6373,11 +8398,16 @@
                 <a:latin typeface="Courier"/>
               </a:rPr>
               <a:t>[1] "hier wird diese Outcome-Liste berücksichtigt:"
-# A tibble: 2 × 3
+# A tibble: 7 × 3
   outcome                source metric
   &lt;chr&gt;                  &lt;chr&gt;  &lt;chr&gt; 
 1 High noise annoyance   road   lden  
 2 High sleep disturbance road   lnight
+3 High noise annoyance   air    lden  
+4 Reading Comprehension  air    lden  
+5 High sleep disturbance air    lnight
+6 High noise annoyance   rail   lden  
+7 High sleep disturbance rail   lnight
 [1] "Nun Kombi:"
 # A tibble: 1 × 3
   outcome              source metric
@@ -6398,6 +8428,81 @@
   outcome                source metric
   &lt;chr&gt;                  &lt;chr&gt;  &lt;chr&gt; 
 1 High sleep disturbance road   lnight</a:t>
+            </a:r>
+          </a:p>
+          <a:p>
+            <a:pPr lvl="0" indent="0">
+              <a:buNone/>
+            </a:pPr>
+            <a:r>
+              <a:rPr>
+                <a:latin typeface="Courier"/>
+              </a:rPr>
+              <a:t>[1] "Nun Kombi:"
+# A tibble: 1 × 3
+  outcome              source metric
+  &lt;chr&gt;                &lt;chr&gt;  &lt;chr&gt; 
+1 High noise annoyance air    lden  </a:t>
+            </a:r>
+          </a:p>
+          <a:p>
+            <a:pPr lvl="0" indent="0">
+              <a:buNone/>
+            </a:pPr>
+            <a:r>
+              <a:rPr>
+                <a:latin typeface="Courier"/>
+              </a:rPr>
+              <a:t>[1] "Nun Kombi:"
+# A tibble: 1 × 3
+  outcome               source metric
+  &lt;chr&gt;                 &lt;chr&gt;  &lt;chr&gt; 
+1 Reading Comprehension air    lden  </a:t>
+            </a:r>
+          </a:p>
+          <a:p>
+            <a:pPr lvl="0" indent="0">
+              <a:buNone/>
+            </a:pPr>
+            <a:r>
+              <a:rPr>
+                <a:latin typeface="Courier"/>
+              </a:rPr>
+              <a:t>[1] "Nun Kombi:"
+# A tibble: 1 × 3
+  outcome                source metric
+  &lt;chr&gt;                  &lt;chr&gt;  &lt;chr&gt; 
+1 High sleep disturbance air    lnight</a:t>
+            </a:r>
+          </a:p>
+          <a:p>
+            <a:pPr lvl="0" indent="0">
+              <a:buNone/>
+            </a:pPr>
+            <a:r>
+              <a:rPr>
+                <a:latin typeface="Courier"/>
+              </a:rPr>
+              <a:t>[1] "Nun Kombi:"
+# A tibble: 1 × 3
+  outcome              source metric
+  &lt;chr&gt;                &lt;chr&gt;  &lt;chr&gt; 
+1 High noise annoyance rail   lden  </a:t>
+            </a:r>
+          </a:p>
+          <a:p>
+            <a:pPr lvl="0" indent="0">
+              <a:buNone/>
+            </a:pPr>
+            <a:r>
+              <a:rPr>
+                <a:latin typeface="Courier"/>
+              </a:rPr>
+              <a:t>[1] "Nun Kombi:"
+# A tibble: 1 × 3
+  outcome                source metric
+  &lt;chr&gt;                  &lt;chr&gt;  &lt;chr&gt; 
+1 High sleep disturbance rail   lnight</a:t>
             </a:r>
           </a:p>
           <a:p>
